--- a/2026-04 GDG Jerez/DotNet Maui con Android.pptx
+++ b/2026-04 GDG Jerez/DotNet Maui con Android.pptx
@@ -5,7 +5,7 @@
     <p:sldMasterId id="2147483797" r:id="rId1"/>
   </p:sldMasterIdLst>
   <p:notesMasterIdLst>
-    <p:notesMasterId r:id="rId13"/>
+    <p:notesMasterId r:id="rId20"/>
   </p:notesMasterIdLst>
   <p:sldIdLst>
     <p:sldId id="256" r:id="rId2"/>
@@ -19,6 +19,13 @@
     <p:sldId id="264" r:id="rId10"/>
     <p:sldId id="265" r:id="rId11"/>
     <p:sldId id="266" r:id="rId12"/>
+    <p:sldId id="267" r:id="rId13"/>
+    <p:sldId id="268" r:id="rId14"/>
+    <p:sldId id="269" r:id="rId15"/>
+    <p:sldId id="270" r:id="rId16"/>
+    <p:sldId id="271" r:id="rId17"/>
+    <p:sldId id="272" r:id="rId18"/>
+    <p:sldId id="273" r:id="rId19"/>
   </p:sldIdLst>
   <p:sldSz cx="12192000" cy="6858000"/>
   <p:notesSz cx="6858000" cy="9144000"/>
@@ -3924,7 +3931,7 @@
           <a:lstStyle/>
           <a:p>
             <a:r>
-              <a:rPr lang="es-ES" dirty="0"/>
+              <a:rPr lang="es-ES" b="1" dirty="0"/>
               <a:t>DotNet.Maui para Android</a:t>
             </a:r>
           </a:p>
@@ -3949,11 +3956,15 @@
         <p:spPr/>
         <p:txBody>
           <a:bodyPr>
-            <a:normAutofit fontScale="92500" lnSpcReduction="10000"/>
+            <a:normAutofit fontScale="77500" lnSpcReduction="20000"/>
           </a:bodyPr>
           <a:lstStyle/>
           <a:p>
             <a:pPr algn="l"/>
+            <a:endParaRPr lang="es-ES" dirty="0"/>
+          </a:p>
+          <a:p>
+            <a:pPr algn="l"/>
             <a:r>
               <a:rPr lang="es-ES" dirty="0"/>
               <a:t>Marco Antonio Blanco</a:t>
@@ -3962,7 +3973,7 @@
           <a:p>
             <a:pPr algn="l"/>
             <a:r>
-              <a:rPr lang="es-ES" dirty="0"/>
+              <a:rPr lang="es-ES" i="1" dirty="0"/>
               <a:t>MVP: Developer Technologies</a:t>
             </a:r>
           </a:p>
@@ -3976,7 +3987,7 @@
           <a:p>
             <a:pPr algn="l"/>
             <a:r>
-              <a:rPr lang="es-ES" dirty="0"/>
+              <a:rPr lang="es-ES" i="1" dirty="0"/>
               <a:t>Mobile Team Lead</a:t>
             </a:r>
           </a:p>
@@ -5990,6 +6001,1083 @@
 </p:sld>
 </file>
 
+<file path=ppt/slides/slide12.xml><?xml version="1.0" encoding="utf-8"?>
+<p:sld xmlns:a="http://schemas.openxmlformats.org/drawingml/2006/main" xmlns:r="http://schemas.openxmlformats.org/officeDocument/2006/relationships" xmlns:p="http://schemas.openxmlformats.org/presentationml/2006/main">
+  <p:cSld>
+    <p:spTree>
+      <p:nvGrpSpPr>
+        <p:cNvPr id="1" name=""/>
+        <p:cNvGrpSpPr/>
+        <p:nvPr/>
+      </p:nvGrpSpPr>
+      <p:grpSpPr>
+        <a:xfrm>
+          <a:off x="0" y="0"/>
+          <a:ext cx="0" cy="0"/>
+          <a:chOff x="0" y="0"/>
+          <a:chExt cx="0" cy="0"/>
+        </a:xfrm>
+      </p:grpSpPr>
+      <p:sp>
+        <p:nvSpPr>
+          <p:cNvPr id="2" name="Título 1">
+            <a:extLst>
+              <a:ext uri="{FF2B5EF4-FFF2-40B4-BE49-F238E27FC236}">
+                <a16:creationId xmlns:a16="http://schemas.microsoft.com/office/drawing/2014/main" id="{DE1B517C-E909-D327-C9B7-207461C98A9D}"/>
+              </a:ext>
+            </a:extLst>
+          </p:cNvPr>
+          <p:cNvSpPr>
+            <a:spLocks noGrp="1"/>
+          </p:cNvSpPr>
+          <p:nvPr>
+            <p:ph type="title"/>
+          </p:nvPr>
+        </p:nvSpPr>
+        <p:spPr/>
+        <p:txBody>
+          <a:bodyPr/>
+          <a:lstStyle/>
+          <a:p>
+            <a:r>
+              <a:rPr lang="es-ES" dirty="0"/>
+              <a:t>Acceso a la API Nativa de la plataforma</a:t>
+            </a:r>
+          </a:p>
+        </p:txBody>
+      </p:sp>
+      <p:sp>
+        <p:nvSpPr>
+          <p:cNvPr id="3" name="Marcador de contenido 2">
+            <a:extLst>
+              <a:ext uri="{FF2B5EF4-FFF2-40B4-BE49-F238E27FC236}">
+                <a16:creationId xmlns:a16="http://schemas.microsoft.com/office/drawing/2014/main" id="{0CC7CAAB-5E35-D5E7-DE31-DE54FF4CC992}"/>
+              </a:ext>
+            </a:extLst>
+          </p:cNvPr>
+          <p:cNvSpPr>
+            <a:spLocks noGrp="1"/>
+          </p:cNvSpPr>
+          <p:nvPr>
+            <p:ph idx="1"/>
+          </p:nvPr>
+        </p:nvSpPr>
+        <p:spPr>
+          <a:xfrm>
+            <a:off x="838200" y="1825625"/>
+            <a:ext cx="10515600" cy="4667250"/>
+          </a:xfrm>
+        </p:spPr>
+        <p:txBody>
+          <a:bodyPr>
+            <a:normAutofit fontScale="92500" lnSpcReduction="10000"/>
+          </a:bodyPr>
+          <a:lstStyle/>
+          <a:p>
+            <a:r>
+              <a:rPr lang="es-ES" dirty="0"/>
+              <a:t>GPS</a:t>
+            </a:r>
+          </a:p>
+          <a:p>
+            <a:r>
+              <a:rPr lang="es-ES" dirty="0"/>
+              <a:t>Mapas</a:t>
+            </a:r>
+          </a:p>
+          <a:p>
+            <a:r>
+              <a:rPr lang="es-ES" dirty="0"/>
+              <a:t>Actividad</a:t>
+            </a:r>
+          </a:p>
+          <a:p>
+            <a:r>
+              <a:rPr lang="es-ES" dirty="0"/>
+              <a:t>Brújula</a:t>
+            </a:r>
+          </a:p>
+          <a:p>
+            <a:r>
+              <a:rPr lang="es-ES" dirty="0"/>
+              <a:t>Giroscopio</a:t>
+            </a:r>
+          </a:p>
+          <a:p>
+            <a:r>
+              <a:rPr lang="es-ES" dirty="0"/>
+              <a:t>Text to </a:t>
+            </a:r>
+            <a:r>
+              <a:rPr lang="es-ES" dirty="0" err="1"/>
+              <a:t>speech</a:t>
+            </a:r>
+            <a:endParaRPr lang="es-ES" dirty="0"/>
+          </a:p>
+          <a:p>
+            <a:r>
+              <a:rPr lang="es-ES" dirty="0"/>
+              <a:t>Email</a:t>
+            </a:r>
+          </a:p>
+          <a:p>
+            <a:r>
+              <a:rPr lang="es-ES" dirty="0"/>
+              <a:t>Batería</a:t>
+            </a:r>
+          </a:p>
+          <a:p>
+            <a:r>
+              <a:rPr lang="es-ES" dirty="0"/>
+              <a:t>Información del dispositivo</a:t>
+            </a:r>
+          </a:p>
+          <a:p>
+            <a:r>
+              <a:rPr lang="es-ES" dirty="0"/>
+              <a:t>Y un largo etc.</a:t>
+            </a:r>
+          </a:p>
+        </p:txBody>
+      </p:sp>
+    </p:spTree>
+    <p:extLst>
+      <p:ext uri="{BB962C8B-B14F-4D97-AF65-F5344CB8AC3E}">
+        <p14:creationId xmlns:p14="http://schemas.microsoft.com/office/powerpoint/2010/main" val="1638962365"/>
+      </p:ext>
+    </p:extLst>
+  </p:cSld>
+  <p:clrMapOvr>
+    <a:masterClrMapping/>
+  </p:clrMapOvr>
+</p:sld>
+</file>
+
+<file path=ppt/slides/slide13.xml><?xml version="1.0" encoding="utf-8"?>
+<p:sld xmlns:a="http://schemas.openxmlformats.org/drawingml/2006/main" xmlns:r="http://schemas.openxmlformats.org/officeDocument/2006/relationships" xmlns:p="http://schemas.openxmlformats.org/presentationml/2006/main">
+  <p:cSld>
+    <p:spTree>
+      <p:nvGrpSpPr>
+        <p:cNvPr id="1" name=""/>
+        <p:cNvGrpSpPr/>
+        <p:nvPr/>
+      </p:nvGrpSpPr>
+      <p:grpSpPr>
+        <a:xfrm>
+          <a:off x="0" y="0"/>
+          <a:ext cx="0" cy="0"/>
+          <a:chOff x="0" y="0"/>
+          <a:chExt cx="0" cy="0"/>
+        </a:xfrm>
+      </p:grpSpPr>
+      <p:sp>
+        <p:nvSpPr>
+          <p:cNvPr id="2" name="Título 1">
+            <a:extLst>
+              <a:ext uri="{FF2B5EF4-FFF2-40B4-BE49-F238E27FC236}">
+                <a16:creationId xmlns:a16="http://schemas.microsoft.com/office/drawing/2014/main" id="{4B4B5DDD-813F-907C-F0E2-EBF638461EF7}"/>
+              </a:ext>
+            </a:extLst>
+          </p:cNvPr>
+          <p:cNvSpPr>
+            <a:spLocks noGrp="1"/>
+          </p:cNvSpPr>
+          <p:nvPr>
+            <p:ph type="title"/>
+          </p:nvPr>
+        </p:nvSpPr>
+        <p:spPr/>
+        <p:txBody>
+          <a:bodyPr/>
+          <a:lstStyle/>
+          <a:p>
+            <a:r>
+              <a:rPr lang="es-ES" dirty="0"/>
+              <a:t>Open source</a:t>
+            </a:r>
+          </a:p>
+        </p:txBody>
+      </p:sp>
+      <p:sp>
+        <p:nvSpPr>
+          <p:cNvPr id="4" name="CuadroTexto 3">
+            <a:extLst>
+              <a:ext uri="{FF2B5EF4-FFF2-40B4-BE49-F238E27FC236}">
+                <a16:creationId xmlns:a16="http://schemas.microsoft.com/office/drawing/2014/main" id="{F3B66B61-D75E-1D3B-D259-A311B2250F65}"/>
+              </a:ext>
+            </a:extLst>
+          </p:cNvPr>
+          <p:cNvSpPr txBox="1"/>
+          <p:nvPr/>
+        </p:nvSpPr>
+        <p:spPr>
+          <a:xfrm>
+            <a:off x="838200" y="4138940"/>
+            <a:ext cx="5247272" cy="523220"/>
+          </a:xfrm>
+          <a:prstGeom prst="rect">
+            <a:avLst/>
+          </a:prstGeom>
+          <a:noFill/>
+        </p:spPr>
+        <p:txBody>
+          <a:bodyPr wrap="square">
+            <a:spAutoFit/>
+          </a:bodyPr>
+          <a:lstStyle/>
+          <a:p>
+            <a:r>
+              <a:rPr lang="es-ES" sz="2800" dirty="0">
+                <a:hlinkClick r:id="rId2"/>
+              </a:rPr>
+              <a:t>https://github.com/dotnet/maui</a:t>
+            </a:r>
+            <a:r>
+              <a:rPr lang="es-ES" sz="2800" dirty="0"/>
+              <a:t> </a:t>
+            </a:r>
+          </a:p>
+        </p:txBody>
+      </p:sp>
+      <p:pic>
+        <p:nvPicPr>
+          <p:cNvPr id="5" name="Picture 2" descr=".NET MAUI Weather App on all platforms">
+            <a:extLst>
+              <a:ext uri="{FF2B5EF4-FFF2-40B4-BE49-F238E27FC236}">
+                <a16:creationId xmlns:a16="http://schemas.microsoft.com/office/drawing/2014/main" id="{6C703B0B-5FBA-CA34-0B2D-92E70DB9DFE8}"/>
+              </a:ext>
+            </a:extLst>
+          </p:cNvPr>
+          <p:cNvPicPr>
+            <a:picLocks noChangeAspect="1" noChangeArrowheads="1"/>
+          </p:cNvPicPr>
+          <p:nvPr/>
+        </p:nvPicPr>
+        <p:blipFill>
+          <a:blip r:embed="rId3">
+            <a:extLst>
+              <a:ext uri="{28A0092B-C50C-407E-A947-70E740481C1C}">
+                <a14:useLocalDpi xmlns:a14="http://schemas.microsoft.com/office/drawing/2010/main" val="0"/>
+              </a:ext>
+            </a:extLst>
+          </a:blip>
+          <a:srcRect/>
+          <a:stretch>
+            <a:fillRect/>
+          </a:stretch>
+        </p:blipFill>
+        <p:spPr bwMode="auto">
+          <a:xfrm>
+            <a:off x="5701527" y="1779830"/>
+            <a:ext cx="6490473" cy="4060658"/>
+          </a:xfrm>
+          <a:prstGeom prst="rect">
+            <a:avLst/>
+          </a:prstGeom>
+          <a:noFill/>
+          <a:extLst>
+            <a:ext uri="{909E8E84-426E-40DD-AFC4-6F175D3DCCD1}">
+              <a14:hiddenFill xmlns:a14="http://schemas.microsoft.com/office/drawing/2010/main">
+                <a:solidFill>
+                  <a:srgbClr val="FFFFFF"/>
+                </a:solidFill>
+              </a14:hiddenFill>
+            </a:ext>
+          </a:extLst>
+        </p:spPr>
+      </p:pic>
+    </p:spTree>
+    <p:extLst>
+      <p:ext uri="{BB962C8B-B14F-4D97-AF65-F5344CB8AC3E}">
+        <p14:creationId xmlns:p14="http://schemas.microsoft.com/office/powerpoint/2010/main" val="1568268229"/>
+      </p:ext>
+    </p:extLst>
+  </p:cSld>
+  <p:clrMapOvr>
+    <a:masterClrMapping/>
+  </p:clrMapOvr>
+</p:sld>
+</file>
+
+<file path=ppt/slides/slide14.xml><?xml version="1.0" encoding="utf-8"?>
+<p:sld xmlns:a="http://schemas.openxmlformats.org/drawingml/2006/main" xmlns:r="http://schemas.openxmlformats.org/officeDocument/2006/relationships" xmlns:p="http://schemas.openxmlformats.org/presentationml/2006/main">
+  <p:cSld>
+    <p:spTree>
+      <p:nvGrpSpPr>
+        <p:cNvPr id="1" name=""/>
+        <p:cNvGrpSpPr/>
+        <p:nvPr/>
+      </p:nvGrpSpPr>
+      <p:grpSpPr>
+        <a:xfrm>
+          <a:off x="0" y="0"/>
+          <a:ext cx="0" cy="0"/>
+          <a:chOff x="0" y="0"/>
+          <a:chExt cx="0" cy="0"/>
+        </a:xfrm>
+      </p:grpSpPr>
+      <p:sp>
+        <p:nvSpPr>
+          <p:cNvPr id="2" name="Título 1">
+            <a:extLst>
+              <a:ext uri="{FF2B5EF4-FFF2-40B4-BE49-F238E27FC236}">
+                <a16:creationId xmlns:a16="http://schemas.microsoft.com/office/drawing/2014/main" id="{6B2F8F49-1EFA-4CB9-37B3-F2543DF2C21F}"/>
+              </a:ext>
+            </a:extLst>
+          </p:cNvPr>
+          <p:cNvSpPr>
+            <a:spLocks noGrp="1"/>
+          </p:cNvSpPr>
+          <p:nvPr>
+            <p:ph type="title"/>
+          </p:nvPr>
+        </p:nvSpPr>
+        <p:spPr/>
+        <p:txBody>
+          <a:bodyPr/>
+          <a:lstStyle/>
+          <a:p>
+            <a:r>
+              <a:rPr lang="es-ES" dirty="0"/>
+              <a:t>XAML</a:t>
+            </a:r>
+          </a:p>
+        </p:txBody>
+      </p:sp>
+      <p:pic>
+        <p:nvPicPr>
+          <p:cNvPr id="4" name="Imagen 3">
+            <a:extLst>
+              <a:ext uri="{FF2B5EF4-FFF2-40B4-BE49-F238E27FC236}">
+                <a16:creationId xmlns:a16="http://schemas.microsoft.com/office/drawing/2014/main" id="{DC8F4DB7-5984-868B-BB7E-8BFC22F19C51}"/>
+              </a:ext>
+            </a:extLst>
+          </p:cNvPr>
+          <p:cNvPicPr>
+            <a:picLocks noChangeAspect="1"/>
+          </p:cNvPicPr>
+          <p:nvPr/>
+        </p:nvPicPr>
+        <p:blipFill rotWithShape="1">
+          <a:blip r:embed="rId2"/>
+          <a:srcRect b="23937"/>
+          <a:stretch/>
+        </p:blipFill>
+        <p:spPr>
+          <a:xfrm>
+            <a:off x="2860106" y="1367870"/>
+            <a:ext cx="7020427" cy="4973692"/>
+          </a:xfrm>
+          <a:prstGeom prst="rect">
+            <a:avLst/>
+          </a:prstGeom>
+        </p:spPr>
+      </p:pic>
+    </p:spTree>
+    <p:extLst>
+      <p:ext uri="{BB962C8B-B14F-4D97-AF65-F5344CB8AC3E}">
+        <p14:creationId xmlns:p14="http://schemas.microsoft.com/office/powerpoint/2010/main" val="1542091010"/>
+      </p:ext>
+    </p:extLst>
+  </p:cSld>
+  <p:clrMapOvr>
+    <a:masterClrMapping/>
+  </p:clrMapOvr>
+</p:sld>
+</file>
+
+<file path=ppt/slides/slide15.xml><?xml version="1.0" encoding="utf-8"?>
+<p:sld xmlns:a="http://schemas.openxmlformats.org/drawingml/2006/main" xmlns:r="http://schemas.openxmlformats.org/officeDocument/2006/relationships" xmlns:p="http://schemas.openxmlformats.org/presentationml/2006/main">
+  <p:cSld>
+    <p:spTree>
+      <p:nvGrpSpPr>
+        <p:cNvPr id="1" name=""/>
+        <p:cNvGrpSpPr/>
+        <p:nvPr/>
+      </p:nvGrpSpPr>
+      <p:grpSpPr>
+        <a:xfrm>
+          <a:off x="0" y="0"/>
+          <a:ext cx="0" cy="0"/>
+          <a:chOff x="0" y="0"/>
+          <a:chExt cx="0" cy="0"/>
+        </a:xfrm>
+      </p:grpSpPr>
+      <p:sp>
+        <p:nvSpPr>
+          <p:cNvPr id="2" name="Título 1">
+            <a:extLst>
+              <a:ext uri="{FF2B5EF4-FFF2-40B4-BE49-F238E27FC236}">
+                <a16:creationId xmlns:a16="http://schemas.microsoft.com/office/drawing/2014/main" id="{CB5F7E6C-E50D-DFA3-E7E2-F8B4595177BC}"/>
+              </a:ext>
+            </a:extLst>
+          </p:cNvPr>
+          <p:cNvSpPr>
+            <a:spLocks noGrp="1"/>
+          </p:cNvSpPr>
+          <p:nvPr>
+            <p:ph type="title"/>
+          </p:nvPr>
+        </p:nvSpPr>
+        <p:spPr/>
+        <p:txBody>
+          <a:bodyPr/>
+          <a:lstStyle/>
+          <a:p>
+            <a:r>
+              <a:rPr lang="es-ES" dirty="0"/>
+              <a:t>Accesibilidad</a:t>
+            </a:r>
+          </a:p>
+        </p:txBody>
+      </p:sp>
+      <p:sp>
+        <p:nvSpPr>
+          <p:cNvPr id="3" name="Marcador de contenido 2">
+            <a:extLst>
+              <a:ext uri="{FF2B5EF4-FFF2-40B4-BE49-F238E27FC236}">
+                <a16:creationId xmlns:a16="http://schemas.microsoft.com/office/drawing/2014/main" id="{707CFCBA-A6F8-7A96-1138-8F56C6F3FC85}"/>
+              </a:ext>
+            </a:extLst>
+          </p:cNvPr>
+          <p:cNvSpPr>
+            <a:spLocks noGrp="1"/>
+          </p:cNvSpPr>
+          <p:nvPr>
+            <p:ph idx="1"/>
+          </p:nvPr>
+        </p:nvSpPr>
+        <p:spPr>
+          <a:xfrm>
+            <a:off x="838200" y="1825625"/>
+            <a:ext cx="10515600" cy="1717675"/>
+          </a:xfrm>
+        </p:spPr>
+        <p:txBody>
+          <a:bodyPr/>
+          <a:lstStyle/>
+          <a:p>
+            <a:r>
+              <a:rPr lang="en-US" dirty="0" err="1"/>
+              <a:t>SemanticProperties.Description</a:t>
+            </a:r>
+            <a:r>
+              <a:rPr lang="en-US" dirty="0"/>
+              <a:t>=“Slide de </a:t>
+            </a:r>
+            <a:r>
+              <a:rPr lang="en-US" dirty="0" err="1"/>
+              <a:t>accesibilidad</a:t>
+            </a:r>
+            <a:r>
+              <a:rPr lang="en-US" dirty="0"/>
+              <a:t>”</a:t>
+            </a:r>
+          </a:p>
+          <a:p>
+            <a:r>
+              <a:rPr lang="en-US" dirty="0" err="1"/>
+              <a:t>SemanticProperties.Hint</a:t>
+            </a:r>
+            <a:r>
+              <a:rPr lang="en-US" dirty="0"/>
+              <a:t>=“</a:t>
+            </a:r>
+            <a:r>
+              <a:rPr lang="en-US" dirty="0" err="1"/>
+              <a:t>Accesibilidad</a:t>
+            </a:r>
+            <a:r>
+              <a:rPr lang="en-US" dirty="0"/>
+              <a:t>”</a:t>
+            </a:r>
+          </a:p>
+          <a:p>
+            <a:r>
+              <a:rPr lang="en-US" dirty="0" err="1"/>
+              <a:t>SemanticProperties.HeadingLevel</a:t>
+            </a:r>
+            <a:r>
+              <a:rPr lang="en-US" dirty="0"/>
+              <a:t>=“Level1”</a:t>
+            </a:r>
+          </a:p>
+          <a:p>
+            <a:pPr marL="0" indent="0">
+              <a:buNone/>
+            </a:pPr>
+            <a:endParaRPr lang="es-ES" dirty="0"/>
+          </a:p>
+        </p:txBody>
+      </p:sp>
+      <p:pic>
+        <p:nvPicPr>
+          <p:cNvPr id="4" name="Imagen 6" descr="Texto&#10;&#10;Descripción generada automáticamente">
+            <a:extLst>
+              <a:ext uri="{FF2B5EF4-FFF2-40B4-BE49-F238E27FC236}">
+                <a16:creationId xmlns:a16="http://schemas.microsoft.com/office/drawing/2014/main" id="{EF9A15D2-124A-0FAA-9089-E7C49F760CBD}"/>
+              </a:ext>
+            </a:extLst>
+          </p:cNvPr>
+          <p:cNvPicPr>
+            <a:picLocks noChangeAspect="1"/>
+          </p:cNvPicPr>
+          <p:nvPr/>
+        </p:nvPicPr>
+        <p:blipFill>
+          <a:blip r:embed="rId2"/>
+          <a:stretch>
+            <a:fillRect/>
+          </a:stretch>
+        </p:blipFill>
+        <p:spPr>
+          <a:xfrm>
+            <a:off x="649757" y="3543300"/>
+            <a:ext cx="10892486" cy="1965960"/>
+          </a:xfrm>
+          <a:prstGeom prst="rect">
+            <a:avLst/>
+          </a:prstGeom>
+        </p:spPr>
+      </p:pic>
+    </p:spTree>
+    <p:extLst>
+      <p:ext uri="{BB962C8B-B14F-4D97-AF65-F5344CB8AC3E}">
+        <p14:creationId xmlns:p14="http://schemas.microsoft.com/office/powerpoint/2010/main" val="1989680403"/>
+      </p:ext>
+    </p:extLst>
+  </p:cSld>
+  <p:clrMapOvr>
+    <a:masterClrMapping/>
+  </p:clrMapOvr>
+</p:sld>
+</file>
+
+<file path=ppt/slides/slide16.xml><?xml version="1.0" encoding="utf-8"?>
+<p:sld xmlns:a="http://schemas.openxmlformats.org/drawingml/2006/main" xmlns:r="http://schemas.openxmlformats.org/officeDocument/2006/relationships" xmlns:p="http://schemas.openxmlformats.org/presentationml/2006/main">
+  <p:cSld>
+    <p:spTree>
+      <p:nvGrpSpPr>
+        <p:cNvPr id="1" name=""/>
+        <p:cNvGrpSpPr/>
+        <p:nvPr/>
+      </p:nvGrpSpPr>
+      <p:grpSpPr>
+        <a:xfrm>
+          <a:off x="0" y="0"/>
+          <a:ext cx="0" cy="0"/>
+          <a:chOff x="0" y="0"/>
+          <a:chExt cx="0" cy="0"/>
+        </a:xfrm>
+      </p:grpSpPr>
+      <p:sp>
+        <p:nvSpPr>
+          <p:cNvPr id="2" name="Título 1">
+            <a:extLst>
+              <a:ext uri="{FF2B5EF4-FFF2-40B4-BE49-F238E27FC236}">
+                <a16:creationId xmlns:a16="http://schemas.microsoft.com/office/drawing/2014/main" id="{27A2CE32-3BD2-83E7-702E-BB87C4E8BE70}"/>
+              </a:ext>
+            </a:extLst>
+          </p:cNvPr>
+          <p:cNvSpPr>
+            <a:spLocks noGrp="1"/>
+          </p:cNvSpPr>
+          <p:nvPr>
+            <p:ph type="title"/>
+          </p:nvPr>
+        </p:nvSpPr>
+        <p:spPr/>
+        <p:txBody>
+          <a:bodyPr/>
+          <a:lstStyle/>
+          <a:p>
+            <a:r>
+              <a:rPr lang="es-ES" dirty="0"/>
+              <a:t>Otras ventajas</a:t>
+            </a:r>
+          </a:p>
+        </p:txBody>
+      </p:sp>
+      <p:sp>
+        <p:nvSpPr>
+          <p:cNvPr id="3" name="Marcador de contenido 2">
+            <a:extLst>
+              <a:ext uri="{FF2B5EF4-FFF2-40B4-BE49-F238E27FC236}">
+                <a16:creationId xmlns:a16="http://schemas.microsoft.com/office/drawing/2014/main" id="{B1860477-7354-7324-9955-96679CD14764}"/>
+              </a:ext>
+            </a:extLst>
+          </p:cNvPr>
+          <p:cNvSpPr>
+            <a:spLocks noGrp="1"/>
+          </p:cNvSpPr>
+          <p:nvPr>
+            <p:ph idx="1"/>
+          </p:nvPr>
+        </p:nvSpPr>
+        <p:spPr>
+          <a:xfrm>
+            <a:off x="838200" y="1837055"/>
+            <a:ext cx="10515600" cy="4351338"/>
+          </a:xfrm>
+        </p:spPr>
+        <p:txBody>
+          <a:bodyPr>
+            <a:normAutofit fontScale="92500" lnSpcReduction="10000"/>
+          </a:bodyPr>
+          <a:lstStyle/>
+          <a:p>
+            <a:r>
+              <a:rPr lang="es-ES" dirty="0"/>
+              <a:t>Documentación</a:t>
+            </a:r>
+          </a:p>
+          <a:p>
+            <a:endParaRPr lang="es-ES" dirty="0"/>
+          </a:p>
+          <a:p>
+            <a:r>
+              <a:rPr lang="es-ES" dirty="0"/>
+              <a:t>Visual Studio 2022 / VSCode</a:t>
+            </a:r>
+          </a:p>
+          <a:p>
+            <a:endParaRPr lang="es-ES" dirty="0"/>
+          </a:p>
+          <a:p>
+            <a:r>
+              <a:rPr lang="es-ES" dirty="0" err="1"/>
+              <a:t>JetBrains</a:t>
+            </a:r>
+            <a:r>
+              <a:rPr lang="es-ES" dirty="0"/>
+              <a:t> </a:t>
+            </a:r>
+            <a:r>
+              <a:rPr lang="es-ES" dirty="0" err="1"/>
+              <a:t>Rider</a:t>
+            </a:r>
+            <a:endParaRPr lang="es-ES" dirty="0"/>
+          </a:p>
+          <a:p>
+            <a:endParaRPr lang="es-ES" dirty="0"/>
+          </a:p>
+          <a:p>
+            <a:r>
+              <a:rPr lang="es-ES" dirty="0"/>
+              <a:t>Gran comunidad: </a:t>
+            </a:r>
+          </a:p>
+          <a:p>
+            <a:pPr lvl="1"/>
+            <a:r>
+              <a:rPr lang="es-ES" dirty="0"/>
+              <a:t>Plugins, soporte, controles, etc.</a:t>
+            </a:r>
+          </a:p>
+          <a:p>
+            <a:pPr lvl="1"/>
+            <a:endParaRPr lang="es-ES" dirty="0"/>
+          </a:p>
+          <a:p>
+            <a:r>
+              <a:rPr lang="es-ES" dirty="0"/>
+              <a:t>No usar Dart</a:t>
+            </a:r>
+          </a:p>
+        </p:txBody>
+      </p:sp>
+      <p:pic>
+        <p:nvPicPr>
+          <p:cNvPr id="4" name="Imagen 3">
+            <a:extLst>
+              <a:ext uri="{FF2B5EF4-FFF2-40B4-BE49-F238E27FC236}">
+                <a16:creationId xmlns:a16="http://schemas.microsoft.com/office/drawing/2014/main" id="{8C8BD859-CDCB-C0CD-A730-4B25C74726D9}"/>
+              </a:ext>
+            </a:extLst>
+          </p:cNvPr>
+          <p:cNvPicPr>
+            <a:picLocks noChangeAspect="1"/>
+          </p:cNvPicPr>
+          <p:nvPr/>
+        </p:nvPicPr>
+        <p:blipFill>
+          <a:blip r:embed="rId2"/>
+          <a:stretch>
+            <a:fillRect/>
+          </a:stretch>
+        </p:blipFill>
+        <p:spPr>
+          <a:xfrm>
+            <a:off x="5674518" y="0"/>
+            <a:ext cx="4264634" cy="3350593"/>
+          </a:xfrm>
+          <a:prstGeom prst="rect">
+            <a:avLst/>
+          </a:prstGeom>
+        </p:spPr>
+      </p:pic>
+      <p:pic>
+        <p:nvPicPr>
+          <p:cNvPr id="5" name="Imagen 4">
+            <a:extLst>
+              <a:ext uri="{FF2B5EF4-FFF2-40B4-BE49-F238E27FC236}">
+                <a16:creationId xmlns:a16="http://schemas.microsoft.com/office/drawing/2014/main" id="{96589F4E-3B22-EDF4-F163-10D34BD9BF74}"/>
+              </a:ext>
+            </a:extLst>
+          </p:cNvPr>
+          <p:cNvPicPr>
+            <a:picLocks noChangeAspect="1"/>
+          </p:cNvPicPr>
+          <p:nvPr/>
+        </p:nvPicPr>
+        <p:blipFill>
+          <a:blip r:embed="rId3"/>
+          <a:stretch>
+            <a:fillRect/>
+          </a:stretch>
+        </p:blipFill>
+        <p:spPr>
+          <a:xfrm>
+            <a:off x="7669530" y="4011078"/>
+            <a:ext cx="4522470" cy="2846922"/>
+          </a:xfrm>
+          <a:prstGeom prst="rect">
+            <a:avLst/>
+          </a:prstGeom>
+        </p:spPr>
+      </p:pic>
+    </p:spTree>
+    <p:extLst>
+      <p:ext uri="{BB962C8B-B14F-4D97-AF65-F5344CB8AC3E}">
+        <p14:creationId xmlns:p14="http://schemas.microsoft.com/office/powerpoint/2010/main" val="562142940"/>
+      </p:ext>
+    </p:extLst>
+  </p:cSld>
+  <p:clrMapOvr>
+    <a:masterClrMapping/>
+  </p:clrMapOvr>
+</p:sld>
+</file>
+
+<file path=ppt/slides/slide17.xml><?xml version="1.0" encoding="utf-8"?>
+<p:sld xmlns:a="http://schemas.openxmlformats.org/drawingml/2006/main" xmlns:r="http://schemas.openxmlformats.org/officeDocument/2006/relationships" xmlns:p="http://schemas.openxmlformats.org/presentationml/2006/main">
+  <p:cSld>
+    <p:spTree>
+      <p:nvGrpSpPr>
+        <p:cNvPr id="1" name=""/>
+        <p:cNvGrpSpPr/>
+        <p:nvPr/>
+      </p:nvGrpSpPr>
+      <p:grpSpPr>
+        <a:xfrm>
+          <a:off x="0" y="0"/>
+          <a:ext cx="0" cy="0"/>
+          <a:chOff x="0" y="0"/>
+          <a:chExt cx="0" cy="0"/>
+        </a:xfrm>
+      </p:grpSpPr>
+      <p:sp>
+        <p:nvSpPr>
+          <p:cNvPr id="2" name="Título 1">
+            <a:extLst>
+              <a:ext uri="{FF2B5EF4-FFF2-40B4-BE49-F238E27FC236}">
+                <a16:creationId xmlns:a16="http://schemas.microsoft.com/office/drawing/2014/main" id="{5D76D95B-23A5-E412-12A8-7BB907FAC6E5}"/>
+              </a:ext>
+            </a:extLst>
+          </p:cNvPr>
+          <p:cNvSpPr>
+            <a:spLocks noGrp="1"/>
+          </p:cNvSpPr>
+          <p:nvPr>
+            <p:ph type="title"/>
+          </p:nvPr>
+        </p:nvSpPr>
+        <p:spPr/>
+        <p:txBody>
+          <a:bodyPr/>
+          <a:lstStyle/>
+          <a:p>
+            <a:r>
+              <a:rPr lang="es-ES" dirty="0"/>
+              <a:t>¿Preguntas?</a:t>
+            </a:r>
+          </a:p>
+        </p:txBody>
+      </p:sp>
+      <p:sp>
+        <p:nvSpPr>
+          <p:cNvPr id="3" name="Marcador de contenido 2">
+            <a:extLst>
+              <a:ext uri="{FF2B5EF4-FFF2-40B4-BE49-F238E27FC236}">
+                <a16:creationId xmlns:a16="http://schemas.microsoft.com/office/drawing/2014/main" id="{7EEFC3E0-5E81-6302-DF2C-9BC24C77664F}"/>
+              </a:ext>
+            </a:extLst>
+          </p:cNvPr>
+          <p:cNvSpPr>
+            <a:spLocks noGrp="1"/>
+          </p:cNvSpPr>
+          <p:nvPr>
+            <p:ph idx="1"/>
+          </p:nvPr>
+        </p:nvSpPr>
+        <p:spPr/>
+        <p:txBody>
+          <a:bodyPr/>
+          <a:lstStyle/>
+          <a:p>
+            <a:r>
+              <a:rPr lang="es-ES" dirty="0"/>
+              <a:t>Canal de Telegram en español: </a:t>
+            </a:r>
+            <a:r>
+              <a:rPr lang="es-ES" dirty="0">
+                <a:hlinkClick r:id="rId2"/>
+              </a:rPr>
+              <a:t>https://t.me/DotNetMauiES</a:t>
+            </a:r>
+            <a:r>
+              <a:rPr lang="es-ES" dirty="0"/>
+              <a:t> </a:t>
+            </a:r>
+          </a:p>
+          <a:p>
+            <a:endParaRPr lang="es-ES" dirty="0"/>
+          </a:p>
+          <a:p>
+            <a:r>
+              <a:rPr lang="es-ES" dirty="0" err="1"/>
+              <a:t>Github</a:t>
+            </a:r>
+            <a:r>
+              <a:rPr lang="es-ES" dirty="0"/>
+              <a:t>: </a:t>
+            </a:r>
+            <a:r>
+              <a:rPr lang="es-ES" dirty="0">
+                <a:hlinkClick r:id="rId3"/>
+              </a:rPr>
+              <a:t>https://github.com/dotnet/maui</a:t>
+            </a:r>
+            <a:r>
+              <a:rPr lang="es-ES" dirty="0"/>
+              <a:t> </a:t>
+            </a:r>
+          </a:p>
+          <a:p>
+            <a:endParaRPr lang="es-ES" dirty="0"/>
+          </a:p>
+          <a:p>
+            <a:r>
+              <a:rPr lang="es-ES" dirty="0" err="1"/>
+              <a:t>Community</a:t>
+            </a:r>
+            <a:r>
+              <a:rPr lang="es-ES" dirty="0"/>
+              <a:t> </a:t>
+            </a:r>
+            <a:r>
+              <a:rPr lang="es-ES" dirty="0" err="1"/>
+              <a:t>Toolkit</a:t>
+            </a:r>
+            <a:r>
+              <a:rPr lang="es-ES" dirty="0"/>
+              <a:t>: </a:t>
+            </a:r>
+            <a:r>
+              <a:rPr lang="es-ES" dirty="0">
+                <a:hlinkClick r:id="rId4"/>
+              </a:rPr>
+              <a:t>https://github.com/CommunityToolkit/Maui</a:t>
+            </a:r>
+            <a:r>
+              <a:rPr lang="es-ES" dirty="0"/>
+              <a:t> </a:t>
+            </a:r>
+          </a:p>
+          <a:p>
+            <a:endParaRPr lang="es-ES" dirty="0"/>
+          </a:p>
+          <a:p>
+            <a:r>
+              <a:rPr lang="es-ES" dirty="0" err="1"/>
+              <a:t>Syncfusion</a:t>
+            </a:r>
+            <a:r>
+              <a:rPr lang="es-ES" dirty="0"/>
+              <a:t> Essentials: </a:t>
+            </a:r>
+            <a:r>
+              <a:rPr lang="es-ES" dirty="0">
+                <a:hlinkClick r:id="rId5"/>
+              </a:rPr>
+              <a:t>https://github.com/syncfusion/essential-ui-kit-for-.net-maui</a:t>
+            </a:r>
+            <a:r>
+              <a:rPr lang="es-ES" dirty="0"/>
+              <a:t> </a:t>
+            </a:r>
+          </a:p>
+        </p:txBody>
+      </p:sp>
+    </p:spTree>
+    <p:extLst>
+      <p:ext uri="{BB962C8B-B14F-4D97-AF65-F5344CB8AC3E}">
+        <p14:creationId xmlns:p14="http://schemas.microsoft.com/office/powerpoint/2010/main" val="535194639"/>
+      </p:ext>
+    </p:extLst>
+  </p:cSld>
+  <p:clrMapOvr>
+    <a:masterClrMapping/>
+  </p:clrMapOvr>
+</p:sld>
+</file>
+
+<file path=ppt/slides/slide18.xml><?xml version="1.0" encoding="utf-8"?>
+<p:sld xmlns:a="http://schemas.openxmlformats.org/drawingml/2006/main" xmlns:r="http://schemas.openxmlformats.org/officeDocument/2006/relationships" xmlns:p="http://schemas.openxmlformats.org/presentationml/2006/main">
+  <p:cSld>
+    <p:spTree>
+      <p:nvGrpSpPr>
+        <p:cNvPr id="1" name=""/>
+        <p:cNvGrpSpPr/>
+        <p:nvPr/>
+      </p:nvGrpSpPr>
+      <p:grpSpPr>
+        <a:xfrm>
+          <a:off x="0" y="0"/>
+          <a:ext cx="0" cy="0"/>
+          <a:chOff x="0" y="0"/>
+          <a:chExt cx="0" cy="0"/>
+        </a:xfrm>
+      </p:grpSpPr>
+      <p:sp>
+        <p:nvSpPr>
+          <p:cNvPr id="2" name="Título 1">
+            <a:extLst>
+              <a:ext uri="{FF2B5EF4-FFF2-40B4-BE49-F238E27FC236}">
+                <a16:creationId xmlns:a16="http://schemas.microsoft.com/office/drawing/2014/main" id="{A0875EA8-063A-DC1E-F6BE-D1353E196074}"/>
+              </a:ext>
+            </a:extLst>
+          </p:cNvPr>
+          <p:cNvSpPr>
+            <a:spLocks noGrp="1"/>
+          </p:cNvSpPr>
+          <p:nvPr>
+            <p:ph type="title"/>
+          </p:nvPr>
+        </p:nvSpPr>
+        <p:spPr/>
+        <p:txBody>
+          <a:bodyPr/>
+          <a:lstStyle/>
+          <a:p>
+            <a:r>
+              <a:rPr lang="es-ES" dirty="0"/>
+              <a:t>¡Muchas gracias!</a:t>
+            </a:r>
+          </a:p>
+        </p:txBody>
+      </p:sp>
+      <p:sp>
+        <p:nvSpPr>
+          <p:cNvPr id="3" name="Marcador de contenido 2">
+            <a:extLst>
+              <a:ext uri="{FF2B5EF4-FFF2-40B4-BE49-F238E27FC236}">
+                <a16:creationId xmlns:a16="http://schemas.microsoft.com/office/drawing/2014/main" id="{8F22CF42-EE7F-7581-BF88-A7A3BCF67D53}"/>
+              </a:ext>
+            </a:extLst>
+          </p:cNvPr>
+          <p:cNvSpPr>
+            <a:spLocks noGrp="1"/>
+          </p:cNvSpPr>
+          <p:nvPr>
+            <p:ph idx="1"/>
+          </p:nvPr>
+        </p:nvSpPr>
+        <p:spPr/>
+        <p:txBody>
+          <a:bodyPr>
+            <a:normAutofit lnSpcReduction="10000"/>
+          </a:bodyPr>
+          <a:lstStyle/>
+          <a:p>
+            <a:r>
+              <a:rPr lang="es-ES" dirty="0"/>
+              <a:t>✉️ marcoablanco@outlook.com</a:t>
+            </a:r>
+          </a:p>
+          <a:p>
+            <a:endParaRPr lang="es-ES" dirty="0"/>
+          </a:p>
+          <a:p>
+            <a:r>
+              <a:rPr lang="es-ES" dirty="0"/>
+              <a:t>Mastodon</a:t>
+            </a:r>
+          </a:p>
+          <a:p>
+            <a:pPr lvl="1"/>
+            <a:r>
+              <a:rPr lang="es-ES" dirty="0"/>
+              <a:t>@marcoablanco@xarxa.cloud</a:t>
+            </a:r>
+          </a:p>
+          <a:p>
+            <a:pPr lvl="1"/>
+            <a:endParaRPr lang="es-ES" dirty="0"/>
+          </a:p>
+          <a:p>
+            <a:r>
+              <a:rPr lang="es-ES" dirty="0"/>
+              <a:t>Diapositivas y demo</a:t>
+            </a:r>
+          </a:p>
+          <a:p>
+            <a:pPr lvl="1"/>
+            <a:r>
+              <a:rPr lang="es-ES" dirty="0">
+                <a:hlinkClick r:id="rId2"/>
+              </a:rPr>
+              <a:t>https://github.com/marcoablanco/Events</a:t>
+            </a:r>
+            <a:endParaRPr lang="es-ES" dirty="0"/>
+          </a:p>
+          <a:p>
+            <a:endParaRPr lang="es-ES" dirty="0"/>
+          </a:p>
+          <a:p>
+            <a:r>
+              <a:rPr lang="es-ES" dirty="0"/>
+              <a:t>Canal de Telegram</a:t>
+            </a:r>
+          </a:p>
+          <a:p>
+            <a:pPr lvl="1"/>
+            <a:r>
+              <a:rPr lang="es-ES" dirty="0">
+                <a:hlinkClick r:id="rId3"/>
+              </a:rPr>
+              <a:t>https://t.me/DotNetMauiES</a:t>
+            </a:r>
+            <a:endParaRPr lang="es-ES" dirty="0"/>
+          </a:p>
+          <a:p>
+            <a:endParaRPr lang="es-ES" dirty="0"/>
+          </a:p>
+        </p:txBody>
+      </p:sp>
+    </p:spTree>
+    <p:extLst>
+      <p:ext uri="{BB962C8B-B14F-4D97-AF65-F5344CB8AC3E}">
+        <p14:creationId xmlns:p14="http://schemas.microsoft.com/office/powerpoint/2010/main" val="3167610858"/>
+      </p:ext>
+    </p:extLst>
+  </p:cSld>
+  <p:clrMapOvr>
+    <a:masterClrMapping/>
+  </p:clrMapOvr>
+</p:sld>
+</file>
+
 <file path=ppt/slides/slide2.xml><?xml version="1.0" encoding="utf-8"?>
 <p:sld xmlns:a="http://schemas.openxmlformats.org/drawingml/2006/main" xmlns:r="http://schemas.openxmlformats.org/officeDocument/2006/relationships" xmlns:p="http://schemas.openxmlformats.org/presentationml/2006/main">
   <p:cSld>

--- a/2026-04 GDG Jerez/DotNet Maui con Android.pptx
+++ b/2026-04 GDG Jerez/DotNet Maui con Android.pptx
@@ -124,6 +124,11 @@
       </a:defRPr>
     </a:lvl9pPr>
   </p:defaultTextStyle>
+  <p:extLst>
+    <p:ext uri="{EFAFB233-063F-42B5-8137-9DF3F51BA10A}">
+      <p15:sldGuideLst xmlns:p15="http://schemas.microsoft.com/office/powerpoint/2012/main"/>
+    </p:ext>
+  </p:extLst>
 </p:presentation>
 </file>
 
@@ -209,7 +214,7 @@
           <a:p>
             <a:fld id="{BA20775E-8237-44D8-A96F-8CB12A2F4181}" type="datetimeFigureOut">
               <a:rPr lang="es-ES" smtClean="0"/>
-              <a:t>21/04/2026</a:t>
+              <a:t>23/04/2026</a:t>
             </a:fld>
             <a:endParaRPr lang="es-ES"/>
           </a:p>
@@ -541,7 +546,7 @@
           <a:p>
             <a:fld id="{E9F67F37-9AFF-4E9E-8313-3E4806690C6F}" type="slidenum">
               <a:rPr lang="es-ES" smtClean="0"/>
-              <a:t>6</a:t>
+              <a:t>3</a:t>
             </a:fld>
             <a:endParaRPr lang="es-ES"/>
           </a:p>
@@ -550,7 +555,7 @@
     </p:spTree>
     <p:extLst>
       <p:ext uri="{BB962C8B-B14F-4D97-AF65-F5344CB8AC3E}">
-        <p14:creationId xmlns:p14="http://schemas.microsoft.com/office/powerpoint/2010/main" val="176665778"/>
+        <p14:creationId xmlns:p14="http://schemas.microsoft.com/office/powerpoint/2010/main" val="1913068862"/>
       </p:ext>
     </p:extLst>
   </p:cSld>
@@ -605,57 +610,9 @@
           <a:lstStyle/>
           <a:p>
             <a:r>
-              <a:rPr lang="en-US" dirty="0"/>
-              <a:t>Black – </a:t>
-            </a:r>
-            <a:r>
-              <a:rPr lang="en-US" dirty="0" err="1"/>
-              <a:t>Mostrar</a:t>
-            </a:r>
-            <a:r>
-              <a:rPr lang="en-US" dirty="0"/>
-              <a:t> </a:t>
-            </a:r>
-            <a:r>
-              <a:rPr lang="en-US" dirty="0" err="1"/>
-              <a:t>información</a:t>
-            </a:r>
-            <a:endParaRPr lang="en-US" dirty="0"/>
-          </a:p>
-          <a:p>
-            <a:r>
-              <a:rPr lang="en-US" dirty="0"/>
-              <a:t>Light blue – User inputs</a:t>
-            </a:r>
-          </a:p>
-          <a:p>
-            <a:r>
-              <a:rPr lang="en-US" dirty="0"/>
-              <a:t>Dark blue – </a:t>
-            </a:r>
-            <a:r>
-              <a:rPr lang="en-US" dirty="0" err="1"/>
-              <a:t>Controles</a:t>
-            </a:r>
-            <a:r>
-              <a:rPr lang="en-US" dirty="0"/>
-              <a:t> </a:t>
-            </a:r>
-            <a:r>
-              <a:rPr lang="en-US" dirty="0" err="1"/>
-              <a:t>compuestos</a:t>
-            </a:r>
-            <a:endParaRPr lang="en-US" dirty="0"/>
-          </a:p>
-          <a:p>
-            <a:r>
-              <a:rPr lang="en-US" dirty="0"/>
-              <a:t>Turquoise – Shapes, draws and forms</a:t>
-            </a:r>
-            <a:endParaRPr lang="es-ES" dirty="0"/>
-          </a:p>
-          <a:p>
-            <a:endParaRPr lang="es-ES" dirty="0"/>
+              <a:rPr lang="es-ES" dirty="0"/>
+              <a:t>18.15</a:t>
+            </a:r>
           </a:p>
         </p:txBody>
       </p:sp>
@@ -676,6 +633,312 @@
           <a:p>
             <a:fld id="{E9F67F37-9AFF-4E9E-8313-3E4806690C6F}" type="slidenum">
               <a:rPr lang="es-ES" smtClean="0"/>
+              <a:t>4</a:t>
+            </a:fld>
+            <a:endParaRPr lang="es-ES"/>
+          </a:p>
+        </p:txBody>
+      </p:sp>
+    </p:spTree>
+    <p:extLst>
+      <p:ext uri="{BB962C8B-B14F-4D97-AF65-F5344CB8AC3E}">
+        <p14:creationId xmlns:p14="http://schemas.microsoft.com/office/powerpoint/2010/main" val="1557083401"/>
+      </p:ext>
+    </p:extLst>
+  </p:cSld>
+  <p:clrMapOvr>
+    <a:masterClrMapping/>
+  </p:clrMapOvr>
+</p:notes>
+</file>
+
+<file path=ppt/notesSlides/notesSlide3.xml><?xml version="1.0" encoding="utf-8"?>
+<p:notes xmlns:a="http://schemas.openxmlformats.org/drawingml/2006/main" xmlns:r="http://schemas.openxmlformats.org/officeDocument/2006/relationships" xmlns:p="http://schemas.openxmlformats.org/presentationml/2006/main">
+  <p:cSld>
+    <p:spTree>
+      <p:nvGrpSpPr>
+        <p:cNvPr id="1" name=""/>
+        <p:cNvGrpSpPr/>
+        <p:nvPr/>
+      </p:nvGrpSpPr>
+      <p:grpSpPr>
+        <a:xfrm>
+          <a:off x="0" y="0"/>
+          <a:ext cx="0" cy="0"/>
+          <a:chOff x="0" y="0"/>
+          <a:chExt cx="0" cy="0"/>
+        </a:xfrm>
+      </p:grpSpPr>
+      <p:sp>
+        <p:nvSpPr>
+          <p:cNvPr id="2" name="Marcador de imagen de diapositiva 1"/>
+          <p:cNvSpPr>
+            <a:spLocks noGrp="1" noRot="1" noChangeAspect="1"/>
+          </p:cNvSpPr>
+          <p:nvPr>
+            <p:ph type="sldImg"/>
+          </p:nvPr>
+        </p:nvSpPr>
+        <p:spPr/>
+      </p:sp>
+      <p:sp>
+        <p:nvSpPr>
+          <p:cNvPr id="3" name="Marcador de notas 2"/>
+          <p:cNvSpPr>
+            <a:spLocks noGrp="1"/>
+          </p:cNvSpPr>
+          <p:nvPr>
+            <p:ph type="body" idx="1"/>
+          </p:nvPr>
+        </p:nvSpPr>
+        <p:spPr/>
+        <p:txBody>
+          <a:bodyPr/>
+          <a:lstStyle/>
+          <a:p>
+            <a:endParaRPr lang="es-ES" dirty="0"/>
+          </a:p>
+        </p:txBody>
+      </p:sp>
+      <p:sp>
+        <p:nvSpPr>
+          <p:cNvPr id="4" name="Marcador de número de diapositiva 3"/>
+          <p:cNvSpPr>
+            <a:spLocks noGrp="1"/>
+          </p:cNvSpPr>
+          <p:nvPr>
+            <p:ph type="sldNum" sz="quarter" idx="5"/>
+          </p:nvPr>
+        </p:nvSpPr>
+        <p:spPr/>
+        <p:txBody>
+          <a:bodyPr/>
+          <a:lstStyle/>
+          <a:p>
+            <a:fld id="{E9F67F37-9AFF-4E9E-8313-3E4806690C6F}" type="slidenum">
+              <a:rPr lang="es-ES" smtClean="0"/>
+              <a:t>5</a:t>
+            </a:fld>
+            <a:endParaRPr lang="es-ES"/>
+          </a:p>
+        </p:txBody>
+      </p:sp>
+    </p:spTree>
+    <p:extLst>
+      <p:ext uri="{BB962C8B-B14F-4D97-AF65-F5344CB8AC3E}">
+        <p14:creationId xmlns:p14="http://schemas.microsoft.com/office/powerpoint/2010/main" val="833521546"/>
+      </p:ext>
+    </p:extLst>
+  </p:cSld>
+  <p:clrMapOvr>
+    <a:masterClrMapping/>
+  </p:clrMapOvr>
+</p:notes>
+</file>
+
+<file path=ppt/notesSlides/notesSlide4.xml><?xml version="1.0" encoding="utf-8"?>
+<p:notes xmlns:a="http://schemas.openxmlformats.org/drawingml/2006/main" xmlns:r="http://schemas.openxmlformats.org/officeDocument/2006/relationships" xmlns:p="http://schemas.openxmlformats.org/presentationml/2006/main">
+  <p:cSld>
+    <p:spTree>
+      <p:nvGrpSpPr>
+        <p:cNvPr id="1" name=""/>
+        <p:cNvGrpSpPr/>
+        <p:nvPr/>
+      </p:nvGrpSpPr>
+      <p:grpSpPr>
+        <a:xfrm>
+          <a:off x="0" y="0"/>
+          <a:ext cx="0" cy="0"/>
+          <a:chOff x="0" y="0"/>
+          <a:chExt cx="0" cy="0"/>
+        </a:xfrm>
+      </p:grpSpPr>
+      <p:sp>
+        <p:nvSpPr>
+          <p:cNvPr id="2" name="Marcador de imagen de diapositiva 1"/>
+          <p:cNvSpPr>
+            <a:spLocks noGrp="1" noRot="1" noChangeAspect="1"/>
+          </p:cNvSpPr>
+          <p:nvPr>
+            <p:ph type="sldImg"/>
+          </p:nvPr>
+        </p:nvSpPr>
+        <p:spPr/>
+      </p:sp>
+      <p:sp>
+        <p:nvSpPr>
+          <p:cNvPr id="3" name="Marcador de notas 2"/>
+          <p:cNvSpPr>
+            <a:spLocks noGrp="1"/>
+          </p:cNvSpPr>
+          <p:nvPr>
+            <p:ph type="body" idx="1"/>
+          </p:nvPr>
+        </p:nvSpPr>
+        <p:spPr/>
+        <p:txBody>
+          <a:bodyPr/>
+          <a:lstStyle/>
+          <a:p>
+            <a:r>
+              <a:rPr lang="es-ES" dirty="0"/>
+              <a:t>18.20</a:t>
+            </a:r>
+          </a:p>
+        </p:txBody>
+      </p:sp>
+      <p:sp>
+        <p:nvSpPr>
+          <p:cNvPr id="4" name="Marcador de número de diapositiva 3"/>
+          <p:cNvSpPr>
+            <a:spLocks noGrp="1"/>
+          </p:cNvSpPr>
+          <p:nvPr>
+            <p:ph type="sldNum" sz="quarter" idx="5"/>
+          </p:nvPr>
+        </p:nvSpPr>
+        <p:spPr/>
+        <p:txBody>
+          <a:bodyPr/>
+          <a:lstStyle/>
+          <a:p>
+            <a:fld id="{E9F67F37-9AFF-4E9E-8313-3E4806690C6F}" type="slidenum">
+              <a:rPr lang="es-ES" smtClean="0"/>
+              <a:t>6</a:t>
+            </a:fld>
+            <a:endParaRPr lang="es-ES"/>
+          </a:p>
+        </p:txBody>
+      </p:sp>
+    </p:spTree>
+    <p:extLst>
+      <p:ext uri="{BB962C8B-B14F-4D97-AF65-F5344CB8AC3E}">
+        <p14:creationId xmlns:p14="http://schemas.microsoft.com/office/powerpoint/2010/main" val="176665778"/>
+      </p:ext>
+    </p:extLst>
+  </p:cSld>
+  <p:clrMapOvr>
+    <a:masterClrMapping/>
+  </p:clrMapOvr>
+</p:notes>
+</file>
+
+<file path=ppt/notesSlides/notesSlide5.xml><?xml version="1.0" encoding="utf-8"?>
+<p:notes xmlns:a="http://schemas.openxmlformats.org/drawingml/2006/main" xmlns:r="http://schemas.openxmlformats.org/officeDocument/2006/relationships" xmlns:p="http://schemas.openxmlformats.org/presentationml/2006/main">
+  <p:cSld>
+    <p:spTree>
+      <p:nvGrpSpPr>
+        <p:cNvPr id="1" name=""/>
+        <p:cNvGrpSpPr/>
+        <p:nvPr/>
+      </p:nvGrpSpPr>
+      <p:grpSpPr>
+        <a:xfrm>
+          <a:off x="0" y="0"/>
+          <a:ext cx="0" cy="0"/>
+          <a:chOff x="0" y="0"/>
+          <a:chExt cx="0" cy="0"/>
+        </a:xfrm>
+      </p:grpSpPr>
+      <p:sp>
+        <p:nvSpPr>
+          <p:cNvPr id="2" name="Marcador de imagen de diapositiva 1"/>
+          <p:cNvSpPr>
+            <a:spLocks noGrp="1" noRot="1" noChangeAspect="1"/>
+          </p:cNvSpPr>
+          <p:nvPr>
+            <p:ph type="sldImg"/>
+          </p:nvPr>
+        </p:nvSpPr>
+        <p:spPr/>
+      </p:sp>
+      <p:sp>
+        <p:nvSpPr>
+          <p:cNvPr id="3" name="Marcador de notas 2"/>
+          <p:cNvSpPr>
+            <a:spLocks noGrp="1"/>
+          </p:cNvSpPr>
+          <p:nvPr>
+            <p:ph type="body" idx="1"/>
+          </p:nvPr>
+        </p:nvSpPr>
+        <p:spPr/>
+        <p:txBody>
+          <a:bodyPr/>
+          <a:lstStyle/>
+          <a:p>
+            <a:r>
+              <a:rPr lang="en-US" dirty="0"/>
+              <a:t>Black – </a:t>
+            </a:r>
+            <a:r>
+              <a:rPr lang="en-US" dirty="0" err="1"/>
+              <a:t>Mostrar</a:t>
+            </a:r>
+            <a:r>
+              <a:rPr lang="en-US" dirty="0"/>
+              <a:t> </a:t>
+            </a:r>
+            <a:r>
+              <a:rPr lang="en-US" dirty="0" err="1"/>
+              <a:t>información</a:t>
+            </a:r>
+            <a:endParaRPr lang="en-US" dirty="0"/>
+          </a:p>
+          <a:p>
+            <a:r>
+              <a:rPr lang="en-US" dirty="0"/>
+              <a:t>Light blue – User inputs</a:t>
+            </a:r>
+          </a:p>
+          <a:p>
+            <a:r>
+              <a:rPr lang="en-US" dirty="0"/>
+              <a:t>Dark blue – </a:t>
+            </a:r>
+            <a:r>
+              <a:rPr lang="en-US" dirty="0" err="1"/>
+              <a:t>Controles</a:t>
+            </a:r>
+            <a:r>
+              <a:rPr lang="en-US" dirty="0"/>
+              <a:t> </a:t>
+            </a:r>
+            <a:r>
+              <a:rPr lang="en-US" dirty="0" err="1"/>
+              <a:t>compuestos</a:t>
+            </a:r>
+            <a:endParaRPr lang="en-US" dirty="0"/>
+          </a:p>
+          <a:p>
+            <a:r>
+              <a:rPr lang="en-US" dirty="0"/>
+              <a:t>Turquoise – Shapes, draws and forms</a:t>
+            </a:r>
+            <a:endParaRPr lang="es-ES" dirty="0"/>
+          </a:p>
+          <a:p>
+            <a:endParaRPr lang="es-ES" dirty="0"/>
+          </a:p>
+        </p:txBody>
+      </p:sp>
+      <p:sp>
+        <p:nvSpPr>
+          <p:cNvPr id="4" name="Marcador de número de diapositiva 3"/>
+          <p:cNvSpPr>
+            <a:spLocks noGrp="1"/>
+          </p:cNvSpPr>
+          <p:nvPr>
+            <p:ph type="sldNum" sz="quarter" idx="5"/>
+          </p:nvPr>
+        </p:nvSpPr>
+        <p:spPr/>
+        <p:txBody>
+          <a:bodyPr/>
+          <a:lstStyle/>
+          <a:p>
+            <a:fld id="{E9F67F37-9AFF-4E9E-8313-3E4806690C6F}" type="slidenum">
+              <a:rPr lang="es-ES" smtClean="0"/>
               <a:t>9</a:t>
             </a:fld>
             <a:endParaRPr lang="es-ES"/>
@@ -686,6 +949,180 @@
     <p:extLst>
       <p:ext uri="{BB962C8B-B14F-4D97-AF65-F5344CB8AC3E}">
         <p14:creationId xmlns:p14="http://schemas.microsoft.com/office/powerpoint/2010/main" val="1712838138"/>
+      </p:ext>
+    </p:extLst>
+  </p:cSld>
+  <p:clrMapOvr>
+    <a:masterClrMapping/>
+  </p:clrMapOvr>
+</p:notes>
+</file>
+
+<file path=ppt/notesSlides/notesSlide6.xml><?xml version="1.0" encoding="utf-8"?>
+<p:notes xmlns:a="http://schemas.openxmlformats.org/drawingml/2006/main" xmlns:r="http://schemas.openxmlformats.org/officeDocument/2006/relationships" xmlns:p="http://schemas.openxmlformats.org/presentationml/2006/main">
+  <p:cSld>
+    <p:spTree>
+      <p:nvGrpSpPr>
+        <p:cNvPr id="1" name=""/>
+        <p:cNvGrpSpPr/>
+        <p:nvPr/>
+      </p:nvGrpSpPr>
+      <p:grpSpPr>
+        <a:xfrm>
+          <a:off x="0" y="0"/>
+          <a:ext cx="0" cy="0"/>
+          <a:chOff x="0" y="0"/>
+          <a:chExt cx="0" cy="0"/>
+        </a:xfrm>
+      </p:grpSpPr>
+      <p:sp>
+        <p:nvSpPr>
+          <p:cNvPr id="2" name="Marcador de imagen de diapositiva 1"/>
+          <p:cNvSpPr>
+            <a:spLocks noGrp="1" noRot="1" noChangeAspect="1"/>
+          </p:cNvSpPr>
+          <p:nvPr>
+            <p:ph type="sldImg"/>
+          </p:nvPr>
+        </p:nvSpPr>
+        <p:spPr/>
+      </p:sp>
+      <p:sp>
+        <p:nvSpPr>
+          <p:cNvPr id="3" name="Marcador de notas 2"/>
+          <p:cNvSpPr>
+            <a:spLocks noGrp="1"/>
+          </p:cNvSpPr>
+          <p:nvPr>
+            <p:ph type="body" idx="1"/>
+          </p:nvPr>
+        </p:nvSpPr>
+        <p:spPr/>
+        <p:txBody>
+          <a:bodyPr/>
+          <a:lstStyle/>
+          <a:p>
+            <a:r>
+              <a:rPr lang="es-ES" dirty="0"/>
+              <a:t>18.30</a:t>
+            </a:r>
+          </a:p>
+        </p:txBody>
+      </p:sp>
+      <p:sp>
+        <p:nvSpPr>
+          <p:cNvPr id="4" name="Marcador de número de diapositiva 3"/>
+          <p:cNvSpPr>
+            <a:spLocks noGrp="1"/>
+          </p:cNvSpPr>
+          <p:nvPr>
+            <p:ph type="sldNum" sz="quarter" idx="5"/>
+          </p:nvPr>
+        </p:nvSpPr>
+        <p:spPr/>
+        <p:txBody>
+          <a:bodyPr/>
+          <a:lstStyle/>
+          <a:p>
+            <a:fld id="{E9F67F37-9AFF-4E9E-8313-3E4806690C6F}" type="slidenum">
+              <a:rPr lang="es-ES" smtClean="0"/>
+              <a:t>11</a:t>
+            </a:fld>
+            <a:endParaRPr lang="es-ES"/>
+          </a:p>
+        </p:txBody>
+      </p:sp>
+    </p:spTree>
+    <p:extLst>
+      <p:ext uri="{BB962C8B-B14F-4D97-AF65-F5344CB8AC3E}">
+        <p14:creationId xmlns:p14="http://schemas.microsoft.com/office/powerpoint/2010/main" val="3841115353"/>
+      </p:ext>
+    </p:extLst>
+  </p:cSld>
+  <p:clrMapOvr>
+    <a:masterClrMapping/>
+  </p:clrMapOvr>
+</p:notes>
+</file>
+
+<file path=ppt/notesSlides/notesSlide7.xml><?xml version="1.0" encoding="utf-8"?>
+<p:notes xmlns:a="http://schemas.openxmlformats.org/drawingml/2006/main" xmlns:r="http://schemas.openxmlformats.org/officeDocument/2006/relationships" xmlns:p="http://schemas.openxmlformats.org/presentationml/2006/main">
+  <p:cSld>
+    <p:spTree>
+      <p:nvGrpSpPr>
+        <p:cNvPr id="1" name=""/>
+        <p:cNvGrpSpPr/>
+        <p:nvPr/>
+      </p:nvGrpSpPr>
+      <p:grpSpPr>
+        <a:xfrm>
+          <a:off x="0" y="0"/>
+          <a:ext cx="0" cy="0"/>
+          <a:chOff x="0" y="0"/>
+          <a:chExt cx="0" cy="0"/>
+        </a:xfrm>
+      </p:grpSpPr>
+      <p:sp>
+        <p:nvSpPr>
+          <p:cNvPr id="2" name="Marcador de imagen de diapositiva 1"/>
+          <p:cNvSpPr>
+            <a:spLocks noGrp="1" noRot="1" noChangeAspect="1"/>
+          </p:cNvSpPr>
+          <p:nvPr>
+            <p:ph type="sldImg"/>
+          </p:nvPr>
+        </p:nvSpPr>
+        <p:spPr/>
+      </p:sp>
+      <p:sp>
+        <p:nvSpPr>
+          <p:cNvPr id="3" name="Marcador de notas 2"/>
+          <p:cNvSpPr>
+            <a:spLocks noGrp="1"/>
+          </p:cNvSpPr>
+          <p:nvPr>
+            <p:ph type="body" idx="1"/>
+          </p:nvPr>
+        </p:nvSpPr>
+        <p:spPr/>
+        <p:txBody>
+          <a:bodyPr/>
+          <a:lstStyle/>
+          <a:p>
+            <a:r>
+              <a:rPr lang="es-ES" dirty="0"/>
+              <a:t>18.40</a:t>
+            </a:r>
+          </a:p>
+        </p:txBody>
+      </p:sp>
+      <p:sp>
+        <p:nvSpPr>
+          <p:cNvPr id="4" name="Marcador de número de diapositiva 3"/>
+          <p:cNvSpPr>
+            <a:spLocks noGrp="1"/>
+          </p:cNvSpPr>
+          <p:nvPr>
+            <p:ph type="sldNum" sz="quarter" idx="5"/>
+          </p:nvPr>
+        </p:nvSpPr>
+        <p:spPr/>
+        <p:txBody>
+          <a:bodyPr/>
+          <a:lstStyle/>
+          <a:p>
+            <a:fld id="{E9F67F37-9AFF-4E9E-8313-3E4806690C6F}" type="slidenum">
+              <a:rPr lang="es-ES" smtClean="0"/>
+              <a:t>17</a:t>
+            </a:fld>
+            <a:endParaRPr lang="es-ES"/>
+          </a:p>
+        </p:txBody>
+      </p:sp>
+    </p:spTree>
+    <p:extLst>
+      <p:ext uri="{BB962C8B-B14F-4D97-AF65-F5344CB8AC3E}">
+        <p14:creationId xmlns:p14="http://schemas.microsoft.com/office/powerpoint/2010/main" val="3671498488"/>
       </p:ext>
     </p:extLst>
   </p:cSld>
@@ -842,7 +1279,7 @@
           <a:p>
             <a:fld id="{51D8D23E-9358-405C-A48F-D172F738ED6A}" type="datetimeFigureOut">
               <a:rPr lang="es-ES" smtClean="0"/>
-              <a:t>18/04/2026</a:t>
+              <a:t>23/04/2026</a:t>
             </a:fld>
             <a:endParaRPr lang="es-ES"/>
           </a:p>
@@ -1040,7 +1477,7 @@
           <a:p>
             <a:fld id="{51D8D23E-9358-405C-A48F-D172F738ED6A}" type="datetimeFigureOut">
               <a:rPr lang="es-ES" smtClean="0"/>
-              <a:t>18/04/2026</a:t>
+              <a:t>23/04/2026</a:t>
             </a:fld>
             <a:endParaRPr lang="es-ES"/>
           </a:p>
@@ -1248,7 +1685,7 @@
           <a:p>
             <a:fld id="{51D8D23E-9358-405C-A48F-D172F738ED6A}" type="datetimeFigureOut">
               <a:rPr lang="es-ES" smtClean="0"/>
-              <a:t>18/04/2026</a:t>
+              <a:t>23/04/2026</a:t>
             </a:fld>
             <a:endParaRPr lang="es-ES"/>
           </a:p>
@@ -1446,7 +1883,7 @@
           <a:p>
             <a:fld id="{51D8D23E-9358-405C-A48F-D172F738ED6A}" type="datetimeFigureOut">
               <a:rPr lang="es-ES" smtClean="0"/>
-              <a:t>18/04/2026</a:t>
+              <a:t>23/04/2026</a:t>
             </a:fld>
             <a:endParaRPr lang="es-ES"/>
           </a:p>
@@ -1721,7 +2158,7 @@
           <a:p>
             <a:fld id="{51D8D23E-9358-405C-A48F-D172F738ED6A}" type="datetimeFigureOut">
               <a:rPr lang="es-ES" smtClean="0"/>
-              <a:t>18/04/2026</a:t>
+              <a:t>23/04/2026</a:t>
             </a:fld>
             <a:endParaRPr lang="es-ES"/>
           </a:p>
@@ -1986,7 +2423,7 @@
           <a:p>
             <a:fld id="{51D8D23E-9358-405C-A48F-D172F738ED6A}" type="datetimeFigureOut">
               <a:rPr lang="es-ES" smtClean="0"/>
-              <a:t>18/04/2026</a:t>
+              <a:t>23/04/2026</a:t>
             </a:fld>
             <a:endParaRPr lang="es-ES"/>
           </a:p>
@@ -2398,7 +2835,7 @@
           <a:p>
             <a:fld id="{51D8D23E-9358-405C-A48F-D172F738ED6A}" type="datetimeFigureOut">
               <a:rPr lang="es-ES" smtClean="0"/>
-              <a:t>18/04/2026</a:t>
+              <a:t>23/04/2026</a:t>
             </a:fld>
             <a:endParaRPr lang="es-ES"/>
           </a:p>
@@ -2539,7 +2976,7 @@
           <a:p>
             <a:fld id="{51D8D23E-9358-405C-A48F-D172F738ED6A}" type="datetimeFigureOut">
               <a:rPr lang="es-ES" smtClean="0"/>
-              <a:t>18/04/2026</a:t>
+              <a:t>23/04/2026</a:t>
             </a:fld>
             <a:endParaRPr lang="es-ES"/>
           </a:p>
@@ -2652,7 +3089,7 @@
           <a:p>
             <a:fld id="{51D8D23E-9358-405C-A48F-D172F738ED6A}" type="datetimeFigureOut">
               <a:rPr lang="es-ES" smtClean="0"/>
-              <a:t>18/04/2026</a:t>
+              <a:t>23/04/2026</a:t>
             </a:fld>
             <a:endParaRPr lang="es-ES"/>
           </a:p>
@@ -2963,7 +3400,7 @@
           <a:p>
             <a:fld id="{51D8D23E-9358-405C-A48F-D172F738ED6A}" type="datetimeFigureOut">
               <a:rPr lang="es-ES" smtClean="0"/>
-              <a:t>18/04/2026</a:t>
+              <a:t>23/04/2026</a:t>
             </a:fld>
             <a:endParaRPr lang="es-ES"/>
           </a:p>
@@ -3251,7 +3688,7 @@
           <a:p>
             <a:fld id="{51D8D23E-9358-405C-A48F-D172F738ED6A}" type="datetimeFigureOut">
               <a:rPr lang="es-ES" smtClean="0"/>
-              <a:t>18/04/2026</a:t>
+              <a:t>23/04/2026</a:t>
             </a:fld>
             <a:endParaRPr lang="es-ES"/>
           </a:p>
@@ -3492,7 +3929,7 @@
           <a:p>
             <a:fld id="{51D8D23E-9358-405C-A48F-D172F738ED6A}" type="datetimeFigureOut">
               <a:rPr lang="es-ES" smtClean="0"/>
-              <a:t>18/04/2026</a:t>
+              <a:t>23/04/2026</a:t>
             </a:fld>
             <a:endParaRPr lang="es-ES"/>
           </a:p>
@@ -3989,6 +4426,41 @@
             <a:r>
               <a:rPr lang="es-ES" i="1" dirty="0"/>
               <a:t>Mobile Team Lead</a:t>
+            </a:r>
+          </a:p>
+        </p:txBody>
+      </p:sp>
+      <p:sp>
+        <p:nvSpPr>
+          <p:cNvPr id="3" name="CuadroTexto 2">
+            <a:extLst>
+              <a:ext uri="{FF2B5EF4-FFF2-40B4-BE49-F238E27FC236}">
+                <a16:creationId xmlns:a16="http://schemas.microsoft.com/office/drawing/2014/main" id="{382E0562-CDF6-3C69-7633-45BE83F91D77}"/>
+              </a:ext>
+            </a:extLst>
+          </p:cNvPr>
+          <p:cNvSpPr txBox="1"/>
+          <p:nvPr/>
+        </p:nvSpPr>
+        <p:spPr>
+          <a:xfrm>
+            <a:off x="7334865" y="5735637"/>
+            <a:ext cx="4247534" cy="646331"/>
+          </a:xfrm>
+          <a:prstGeom prst="rect">
+            <a:avLst/>
+          </a:prstGeom>
+          <a:noFill/>
+        </p:spPr>
+        <p:txBody>
+          <a:bodyPr wrap="square" rtlCol="0">
+            <a:spAutoFit/>
+          </a:bodyPr>
+          <a:lstStyle/>
+          <a:p>
+            <a:r>
+              <a:rPr lang="es-ES" sz="3600" dirty="0"/>
+              <a:t>AGRADECIMIENTOS</a:t>
             </a:r>
           </a:p>
         </p:txBody>
@@ -5973,7 +6445,7 @@
           </p:nvPr>
         </p:nvPicPr>
         <p:blipFill>
-          <a:blip r:embed="rId2"/>
+          <a:blip r:embed="rId3"/>
           <a:stretch>
             <a:fillRect/>
           </a:stretch>
@@ -6831,7 +7303,7 @@
             </a:r>
             <a:r>
               <a:rPr lang="es-ES" dirty="0">
-                <a:hlinkClick r:id="rId2"/>
+                <a:hlinkClick r:id="rId3"/>
               </a:rPr>
               <a:t>https://t.me/DotNetMauiES</a:t>
             </a:r>
@@ -6847,37 +7319,6 @@
             <a:r>
               <a:rPr lang="es-ES" dirty="0" err="1"/>
               <a:t>Github</a:t>
-            </a:r>
-            <a:r>
-              <a:rPr lang="es-ES" dirty="0"/>
-              <a:t>: </a:t>
-            </a:r>
-            <a:r>
-              <a:rPr lang="es-ES" dirty="0">
-                <a:hlinkClick r:id="rId3"/>
-              </a:rPr>
-              <a:t>https://github.com/dotnet/maui</a:t>
-            </a:r>
-            <a:r>
-              <a:rPr lang="es-ES" dirty="0"/>
-              <a:t> </a:t>
-            </a:r>
-          </a:p>
-          <a:p>
-            <a:endParaRPr lang="es-ES" dirty="0"/>
-          </a:p>
-          <a:p>
-            <a:r>
-              <a:rPr lang="es-ES" dirty="0" err="1"/>
-              <a:t>Community</a:t>
-            </a:r>
-            <a:r>
-              <a:rPr lang="es-ES" dirty="0"/>
-              <a:t> </a:t>
-            </a:r>
-            <a:r>
-              <a:rPr lang="es-ES" dirty="0" err="1"/>
-              <a:t>Toolkit</a:t>
             </a:r>
             <a:r>
               <a:rPr lang="es-ES" dirty="0"/>
@@ -6887,7 +7328,7 @@
               <a:rPr lang="es-ES" dirty="0">
                 <a:hlinkClick r:id="rId4"/>
               </a:rPr>
-              <a:t>https://github.com/CommunityToolkit/Maui</a:t>
+              <a:t>https://github.com/dotnet/maui</a:t>
             </a:r>
             <a:r>
               <a:rPr lang="es-ES" dirty="0"/>
@@ -6900,6 +7341,37 @@
           <a:p>
             <a:r>
               <a:rPr lang="es-ES" dirty="0" err="1"/>
+              <a:t>Community</a:t>
+            </a:r>
+            <a:r>
+              <a:rPr lang="es-ES" dirty="0"/>
+              <a:t> </a:t>
+            </a:r>
+            <a:r>
+              <a:rPr lang="es-ES" dirty="0" err="1"/>
+              <a:t>Toolkit</a:t>
+            </a:r>
+            <a:r>
+              <a:rPr lang="es-ES" dirty="0"/>
+              <a:t>: </a:t>
+            </a:r>
+            <a:r>
+              <a:rPr lang="es-ES" dirty="0">
+                <a:hlinkClick r:id="rId5"/>
+              </a:rPr>
+              <a:t>https://github.com/CommunityToolkit/Maui</a:t>
+            </a:r>
+            <a:r>
+              <a:rPr lang="es-ES" dirty="0"/>
+              <a:t> </a:t>
+            </a:r>
+          </a:p>
+          <a:p>
+            <a:endParaRPr lang="es-ES" dirty="0"/>
+          </a:p>
+          <a:p>
+            <a:r>
+              <a:rPr lang="es-ES" dirty="0" err="1"/>
               <a:t>Syncfusion</a:t>
             </a:r>
             <a:r>
@@ -6908,7 +7380,7 @@
             </a:r>
             <a:r>
               <a:rPr lang="es-ES" dirty="0">
-                <a:hlinkClick r:id="rId5"/>
+                <a:hlinkClick r:id="rId6"/>
               </a:rPr>
               <a:t>https://github.com/syncfusion/essential-ui-kit-for-.net-maui</a:t>
             </a:r>
@@ -7264,7 +7736,7 @@
           </p:nvPr>
         </p:nvPicPr>
         <p:blipFill rotWithShape="1">
-          <a:blip r:embed="rId2">
+          <a:blip r:embed="rId3">
             <a:extLst>
               <a:ext uri="{28A0092B-C50C-407E-A947-70E740481C1C}">
                 <a14:useLocalDpi xmlns:a14="http://schemas.microsoft.com/office/drawing/2010/main" val="0"/>
@@ -7551,7 +8023,7 @@
           <p:nvPr/>
         </p:nvPicPr>
         <p:blipFill>
-          <a:blip r:embed="rId2">
+          <a:blip r:embed="rId3">
             <a:extLst>
               <a:ext uri="{28A0092B-C50C-407E-A947-70E740481C1C}">
                 <a14:useLocalDpi xmlns:a14="http://schemas.microsoft.com/office/drawing/2010/main" val="0"/>
